--- a/public/ads/Presentation - Evalsy Transforming Hiring with AI.pptx
+++ b/public/ads/Presentation - Evalsy Transforming Hiring with AI.pptx
@@ -6301,7 +6301,7 @@
         <p:spPr>
           <a:xfrm rot="0">
             <a:off x="3833077" y="4597802"/>
-            <a:ext cx="4860387" cy="925839"/>
+            <a:ext cx="4860387" cy="1868814"/>
           </a:xfrm>
           <a:prstGeom prst="rect">
             <a:avLst/>
@@ -6328,8 +6328,15 @@
                 <a:cs typeface="Open Sans"/>
                 <a:sym typeface="Open Sans"/>
               </a:rPr>
-              <a:t>Lorem ipsum dolor sit amet, consectetur adipiscing elit, sed do eiusmod tempor incididunt ut labore et dolore magna aliqua. </a:t>
+              <a:t>Candidates can take interviews anytime that works for them. No need for scheduling or live coordination—everything is handled automatically, and you can review responses when you're ready.</a:t>
             </a:r>
+          </a:p>
+          <a:p>
+            <a:pPr algn="l">
+              <a:lnSpc>
+                <a:spcPts val="2519"/>
+              </a:lnSpc>
+            </a:pPr>
           </a:p>
         </p:txBody>
       </p:sp>
@@ -6342,7 +6349,7 @@
         <p:spPr>
           <a:xfrm rot="0">
             <a:off x="12036530" y="4597802"/>
-            <a:ext cx="4848586" cy="925839"/>
+            <a:ext cx="4848586" cy="1554489"/>
           </a:xfrm>
           <a:prstGeom prst="rect">
             <a:avLst/>
@@ -6369,8 +6376,15 @@
                 <a:cs typeface="Open Sans"/>
                 <a:sym typeface="Open Sans"/>
               </a:rPr>
-              <a:t>Lorem ipsum dolor sit amet, consectetur adipiscing elit, sed do eiusmod tempor incididunt ut labore et dolore magna aliqua. </a:t>
+              <a:t>We help keep your hiring process fair by spotting things like impersonation or off-camera help during interviews. You’ll get alerts if something doesn’t seem right.</a:t>
             </a:r>
+          </a:p>
+          <a:p>
+            <a:pPr algn="l">
+              <a:lnSpc>
+                <a:spcPts val="2519"/>
+              </a:lnSpc>
+            </a:pPr>
           </a:p>
         </p:txBody>
       </p:sp>
@@ -6383,7 +6397,7 @@
         <p:spPr>
           <a:xfrm rot="0">
             <a:off x="3833077" y="7582152"/>
-            <a:ext cx="4766998" cy="925839"/>
+            <a:ext cx="4766998" cy="1554489"/>
           </a:xfrm>
           <a:prstGeom prst="rect">
             <a:avLst/>
@@ -6410,8 +6424,15 @@
                 <a:cs typeface="Open Sans"/>
                 <a:sym typeface="Open Sans"/>
               </a:rPr>
-              <a:t>Lorem ipsum dolor sit amet, consectetur adipiscing elit, sed do eiusmod tempor incididunt ut labore et dolore magna aliqua. </a:t>
+              <a:t>Our system reviews answers and highlights the top candidates based on how well they match your job requirements. It saves you time and helps you focus on who really fits.</a:t>
             </a:r>
+          </a:p>
+          <a:p>
+            <a:pPr algn="l">
+              <a:lnSpc>
+                <a:spcPts val="2519"/>
+              </a:lnSpc>
+            </a:pPr>
           </a:p>
         </p:txBody>
       </p:sp>
@@ -6424,7 +6445,7 @@
         <p:spPr>
           <a:xfrm rot="0">
             <a:off x="12036530" y="7582152"/>
-            <a:ext cx="4848586" cy="925839"/>
+            <a:ext cx="4848586" cy="1554489"/>
           </a:xfrm>
           <a:prstGeom prst="rect">
             <a:avLst/>
@@ -6451,8 +6472,15 @@
                 <a:cs typeface="Open Sans"/>
                 <a:sym typeface="Open Sans"/>
               </a:rPr>
-              <a:t>Lorem ipsum dolor sit amet, consectetur adipiscing elit, sed do eiusmod tempor incididunt ut labore et dolore magna aliqua. </a:t>
+              <a:t>See how each candidate performed, from response quality to communication style. Our analytics give you a clear view to support better hiring decisions.</a:t>
             </a:r>
+          </a:p>
+          <a:p>
+            <a:pPr algn="l">
+              <a:lnSpc>
+                <a:spcPts val="2519"/>
+              </a:lnSpc>
+            </a:pPr>
           </a:p>
         </p:txBody>
       </p:sp>
